--- a/assets/pptx/catalog-671.pptx
+++ b/assets/pptx/catalog-671.pptx
@@ -3269,7 +3269,7 @@
                 <a:ea typeface="Ebrima"/>
                 <a:cs typeface="Ebrima"/>
               </a:rPr>
-              <a:t>መገኘቱ ህልውናው ይታወቀኛል (2x)</a:t>
+              <a:t>መገኘቱ ህልውናው ይታወቀኛል 2x</a:t>
             </a:r>
           </a:p>
           <a:p>
@@ -3372,7 +3372,7 @@
                 <a:ea typeface="Ebrima"/>
                 <a:cs typeface="Ebrima"/>
               </a:rPr>
-              <a:t>ጌታ ጌታ ጌታ ጌታ ጌታ (4x)</a:t>
+              <a:t>ጌታ ጌታ ጌታ ጌታ ጌታ 4x</a:t>
             </a:r>
           </a:p>
           <a:p>
@@ -3547,7 +3547,7 @@
                 <a:ea typeface="Ebrima"/>
                 <a:cs typeface="Ebrima"/>
               </a:rPr>
-              <a:t>ታላቁ ኢየሱስ የምትመራኝ (2x)</a:t>
+              <a:t>ታላቁ ኢየሱስ የምትመራኝ 2x</a:t>
             </a:r>
           </a:p>
         </p:txBody>
@@ -3614,7 +3614,7 @@
                 <a:ea typeface="Ebrima"/>
                 <a:cs typeface="Ebrima"/>
               </a:rPr>
-              <a:t>ሀ ሁ ጌታ (2x)</a:t>
+              <a:t>ሀ ሁ ጌታ 2x</a:t>
             </a:r>
           </a:p>
         </p:txBody>
@@ -3717,7 +3717,7 @@
                 <a:ea typeface="Ebrima"/>
                 <a:cs typeface="Ebrima"/>
               </a:rPr>
-              <a:t>መገኘቱ ህልውናው ይታወቀኛል (2x)</a:t>
+              <a:t>መገኘቱ ህልውናው ይታወቀኛል 2x</a:t>
             </a:r>
           </a:p>
           <a:p>
@@ -3820,7 +3820,7 @@
                 <a:ea typeface="Ebrima"/>
                 <a:cs typeface="Ebrima"/>
               </a:rPr>
-              <a:t>ጌታ ጌታ ጌታ ጌታ ጌታ (4x)</a:t>
+              <a:t>ጌታ ጌታ ጌታ ጌታ ጌታ 4x</a:t>
             </a:r>
           </a:p>
           <a:p>
@@ -3977,7 +3977,7 @@
                 <a:ea typeface="Ebrima"/>
                 <a:cs typeface="Ebrima"/>
               </a:rPr>
-              <a:t>እርሱ ለእኔ (3x) ቅርቤ ነው</a:t>
+              <a:t>እርሱ ለእኔ 3x ቅርቤ ነው</a:t>
             </a:r>
           </a:p>
           <a:p>
@@ -4152,7 +4152,7 @@
                 <a:ea typeface="Ebrima"/>
                 <a:cs typeface="Ebrima"/>
               </a:rPr>
-              <a:t>ታዲያ ከየት ይገኛል (2x)</a:t>
+              <a:t>ታዲያ ከየት ይገኛል 2x</a:t>
             </a:r>
           </a:p>
         </p:txBody>
@@ -4255,7 +4255,7 @@
                 <a:ea typeface="Ebrima"/>
                 <a:cs typeface="Ebrima"/>
               </a:rPr>
-              <a:t>መኖሩንም ደስ በሚለው መንፈሱ ይገልጥልኛል (2x)</a:t>
+              <a:t>መኖሩንም ደስ በሚለው መንፈሱ ይገልጥልኛል 2x</a:t>
             </a:r>
           </a:p>
           <a:p>
@@ -4291,7 +4291,7 @@
                 <a:ea typeface="Ebrima"/>
                 <a:cs typeface="Ebrima"/>
               </a:rPr>
-              <a:t>እርሱ ይቀርበኛል (2x)</a:t>
+              <a:t>እርሱ ይቀርበኛል 2x</a:t>
             </a:r>
           </a:p>
         </p:txBody>
@@ -4376,7 +4376,7 @@
                 <a:ea typeface="Ebrima"/>
                 <a:cs typeface="Ebrima"/>
               </a:rPr>
-              <a:t>ጊዜን አይመርጥም (4x)</a:t>
+              <a:t>ጊዜን አይመርጥም 4x</a:t>
             </a:r>
           </a:p>
         </p:txBody>
@@ -4443,7 +4443,7 @@
                 <a:ea typeface="Ebrima"/>
                 <a:cs typeface="Ebrima"/>
               </a:rPr>
-              <a:t>ሀ ሁ ጌታ (2x)</a:t>
+              <a:t>ሀ ሁ ጌታ 2x</a:t>
             </a:r>
           </a:p>
         </p:txBody>
